--- a/Miniproject 1 Presentation Gavin Good.pptx
+++ b/Miniproject 1 Presentation Gavin Good.pptx
@@ -116,6 +116,382 @@
     </p:ext>
   </p:extLst>
 </p:presentation>
+</file>
+
+<file path=ppt/revisionInfo.xml><?xml version="1.0" encoding="utf-8"?>
+<p1510:revInfo xmlns:a="http://schemas.openxmlformats.org/drawingml/2006/main" xmlns:r="http://schemas.openxmlformats.org/officeDocument/2006/relationships" xmlns:p1510="http://schemas.microsoft.com/office/powerpoint/2015/10/main">
+  <p1510:revLst>
+    <p1510:client id="{96086A50-276A-47EF-834A-1D0829C9E51B}" v="4" dt="2026-09-17T13:07:48.561"/>
+  </p1510:revLst>
+</p1510:revInfo>
+</file>
+
+<file path=ppt/changesInfos/changesInfo1.xml><?xml version="1.0" encoding="utf-8"?>
+<pc:chgInfo xmlns:a="http://schemas.openxmlformats.org/drawingml/2006/main" xmlns:r="http://schemas.openxmlformats.org/officeDocument/2006/relationships" xmlns:ac="http://schemas.microsoft.com/office/drawing/2013/main/command" xmlns:pc="http://schemas.microsoft.com/office/powerpoint/2013/main/command">
+  <pc:docChgLst>
+    <pc:chgData name="Good, Gavin Riley" userId="3384e738-8540-4d73-a9f5-fa11d2679fd4" providerId="ADAL" clId="{4E42D713-9302-492F-A851-20F1D99D0ECC}"/>
+    <pc:docChg chg="undo custSel modSld">
+      <pc:chgData name="Good, Gavin Riley" userId="3384e738-8540-4d73-a9f5-fa11d2679fd4" providerId="ADAL" clId="{4E42D713-9302-492F-A851-20F1D99D0ECC}" dt="2026-09-17T13:08:35.794" v="79" actId="27636"/>
+      <pc:docMkLst>
+        <pc:docMk/>
+      </pc:docMkLst>
+      <pc:sldChg chg="delSp modSp mod">
+        <pc:chgData name="Good, Gavin Riley" userId="3384e738-8540-4d73-a9f5-fa11d2679fd4" providerId="ADAL" clId="{4E42D713-9302-492F-A851-20F1D99D0ECC}" dt="2026-09-17T13:02:05.967" v="38" actId="27636"/>
+        <pc:sldMkLst>
+          <pc:docMk/>
+          <pc:sldMk cId="0" sldId="257"/>
+        </pc:sldMkLst>
+        <pc:spChg chg="mod">
+          <ac:chgData name="Good, Gavin Riley" userId="3384e738-8540-4d73-a9f5-fa11d2679fd4" providerId="ADAL" clId="{4E42D713-9302-492F-A851-20F1D99D0ECC}" dt="2026-09-17T13:00:22.330" v="3" actId="27636"/>
+          <ac:spMkLst>
+            <pc:docMk/>
+            <pc:sldMk cId="0" sldId="257"/>
+            <ac:spMk id="4" creationId="{00000000-0000-0000-0000-000000000000}"/>
+          </ac:spMkLst>
+        </pc:spChg>
+        <pc:spChg chg="mod">
+          <ac:chgData name="Good, Gavin Riley" userId="3384e738-8540-4d73-a9f5-fa11d2679fd4" providerId="ADAL" clId="{4E42D713-9302-492F-A851-20F1D99D0ECC}" dt="2026-09-17T13:00:31.642" v="4" actId="1076"/>
+          <ac:spMkLst>
+            <pc:docMk/>
+            <pc:sldMk cId="0" sldId="257"/>
+            <ac:spMk id="5" creationId="{00000000-0000-0000-0000-000000000000}"/>
+          </ac:spMkLst>
+        </pc:spChg>
+        <pc:spChg chg="mod">
+          <ac:chgData name="Good, Gavin Riley" userId="3384e738-8540-4d73-a9f5-fa11d2679fd4" providerId="ADAL" clId="{4E42D713-9302-492F-A851-20F1D99D0ECC}" dt="2026-09-17T13:00:31.642" v="4" actId="1076"/>
+          <ac:spMkLst>
+            <pc:docMk/>
+            <pc:sldMk cId="0" sldId="257"/>
+            <ac:spMk id="6" creationId="{00000000-0000-0000-0000-000000000000}"/>
+          </ac:spMkLst>
+        </pc:spChg>
+        <pc:spChg chg="mod">
+          <ac:chgData name="Good, Gavin Riley" userId="3384e738-8540-4d73-a9f5-fa11d2679fd4" providerId="ADAL" clId="{4E42D713-9302-492F-A851-20F1D99D0ECC}" dt="2026-09-17T13:00:31.642" v="4" actId="1076"/>
+          <ac:spMkLst>
+            <pc:docMk/>
+            <pc:sldMk cId="0" sldId="257"/>
+            <ac:spMk id="7" creationId="{00000000-0000-0000-0000-000000000000}"/>
+          </ac:spMkLst>
+        </pc:spChg>
+        <pc:spChg chg="mod">
+          <ac:chgData name="Good, Gavin Riley" userId="3384e738-8540-4d73-a9f5-fa11d2679fd4" providerId="ADAL" clId="{4E42D713-9302-492F-A851-20F1D99D0ECC}" dt="2026-09-17T13:00:31.642" v="4" actId="1076"/>
+          <ac:spMkLst>
+            <pc:docMk/>
+            <pc:sldMk cId="0" sldId="257"/>
+            <ac:spMk id="8" creationId="{00000000-0000-0000-0000-000000000000}"/>
+          </ac:spMkLst>
+        </pc:spChg>
+        <pc:spChg chg="mod">
+          <ac:chgData name="Good, Gavin Riley" userId="3384e738-8540-4d73-a9f5-fa11d2679fd4" providerId="ADAL" clId="{4E42D713-9302-492F-A851-20F1D99D0ECC}" dt="2026-09-17T13:00:31.642" v="4" actId="1076"/>
+          <ac:spMkLst>
+            <pc:docMk/>
+            <pc:sldMk cId="0" sldId="257"/>
+            <ac:spMk id="9" creationId="{00000000-0000-0000-0000-000000000000}"/>
+          </ac:spMkLst>
+        </pc:spChg>
+        <pc:spChg chg="mod">
+          <ac:chgData name="Good, Gavin Riley" userId="3384e738-8540-4d73-a9f5-fa11d2679fd4" providerId="ADAL" clId="{4E42D713-9302-492F-A851-20F1D99D0ECC}" dt="2026-09-17T13:02:05.967" v="38" actId="27636"/>
+          <ac:spMkLst>
+            <pc:docMk/>
+            <pc:sldMk cId="0" sldId="257"/>
+            <ac:spMk id="10" creationId="{00000000-0000-0000-0000-000000000000}"/>
+          </ac:spMkLst>
+        </pc:spChg>
+        <pc:spChg chg="mod">
+          <ac:chgData name="Good, Gavin Riley" userId="3384e738-8540-4d73-a9f5-fa11d2679fd4" providerId="ADAL" clId="{4E42D713-9302-492F-A851-20F1D99D0ECC}" dt="2026-09-17T13:00:31.642" v="4" actId="1076"/>
+          <ac:spMkLst>
+            <pc:docMk/>
+            <pc:sldMk cId="0" sldId="257"/>
+            <ac:spMk id="11" creationId="{00000000-0000-0000-0000-000000000000}"/>
+          </ac:spMkLst>
+        </pc:spChg>
+        <pc:spChg chg="mod">
+          <ac:chgData name="Good, Gavin Riley" userId="3384e738-8540-4d73-a9f5-fa11d2679fd4" providerId="ADAL" clId="{4E42D713-9302-492F-A851-20F1D99D0ECC}" dt="2026-09-17T13:00:31.642" v="4" actId="1076"/>
+          <ac:spMkLst>
+            <pc:docMk/>
+            <pc:sldMk cId="0" sldId="257"/>
+            <ac:spMk id="12" creationId="{00000000-0000-0000-0000-000000000000}"/>
+          </ac:spMkLst>
+        </pc:spChg>
+        <pc:spChg chg="mod">
+          <ac:chgData name="Good, Gavin Riley" userId="3384e738-8540-4d73-a9f5-fa11d2679fd4" providerId="ADAL" clId="{4E42D713-9302-492F-A851-20F1D99D0ECC}" dt="2026-09-17T13:00:31.642" v="4" actId="1076"/>
+          <ac:spMkLst>
+            <pc:docMk/>
+            <pc:sldMk cId="0" sldId="257"/>
+            <ac:spMk id="13" creationId="{00000000-0000-0000-0000-000000000000}"/>
+          </ac:spMkLst>
+        </pc:spChg>
+        <pc:spChg chg="del">
+          <ac:chgData name="Good, Gavin Riley" userId="3384e738-8540-4d73-a9f5-fa11d2679fd4" providerId="ADAL" clId="{4E42D713-9302-492F-A851-20F1D99D0ECC}" dt="2026-09-17T12:59:58.954" v="0" actId="478"/>
+          <ac:spMkLst>
+            <pc:docMk/>
+            <pc:sldMk cId="0" sldId="257"/>
+            <ac:spMk id="14" creationId="{00000000-0000-0000-0000-000000000000}"/>
+          </ac:spMkLst>
+        </pc:spChg>
+      </pc:sldChg>
+      <pc:sldChg chg="addSp delSp modSp mod">
+        <pc:chgData name="Good, Gavin Riley" userId="3384e738-8540-4d73-a9f5-fa11d2679fd4" providerId="ADAL" clId="{4E42D713-9302-492F-A851-20F1D99D0ECC}" dt="2026-09-17T13:05:09.273" v="59" actId="1076"/>
+        <pc:sldMkLst>
+          <pc:docMk/>
+          <pc:sldMk cId="0" sldId="258"/>
+        </pc:sldMkLst>
+        <pc:spChg chg="mod">
+          <ac:chgData name="Good, Gavin Riley" userId="3384e738-8540-4d73-a9f5-fa11d2679fd4" providerId="ADAL" clId="{4E42D713-9302-492F-A851-20F1D99D0ECC}" dt="2026-09-17T13:03:44.882" v="43" actId="1076"/>
+          <ac:spMkLst>
+            <pc:docMk/>
+            <pc:sldMk cId="0" sldId="258"/>
+            <ac:spMk id="4" creationId="{00000000-0000-0000-0000-000000000000}"/>
+          </ac:spMkLst>
+        </pc:spChg>
+        <pc:spChg chg="mod">
+          <ac:chgData name="Good, Gavin Riley" userId="3384e738-8540-4d73-a9f5-fa11d2679fd4" providerId="ADAL" clId="{4E42D713-9302-492F-A851-20F1D99D0ECC}" dt="2026-09-17T13:01:13.377" v="23" actId="27636"/>
+          <ac:spMkLst>
+            <pc:docMk/>
+            <pc:sldMk cId="0" sldId="258"/>
+            <ac:spMk id="8" creationId="{00000000-0000-0000-0000-000000000000}"/>
+          </ac:spMkLst>
+        </pc:spChg>
+        <pc:spChg chg="mod">
+          <ac:chgData name="Good, Gavin Riley" userId="3384e738-8540-4d73-a9f5-fa11d2679fd4" providerId="ADAL" clId="{4E42D713-9302-492F-A851-20F1D99D0ECC}" dt="2026-09-17T13:03:49.381" v="44" actId="1076"/>
+          <ac:spMkLst>
+            <pc:docMk/>
+            <pc:sldMk cId="0" sldId="258"/>
+            <ac:spMk id="9" creationId="{00000000-0000-0000-0000-000000000000}"/>
+          </ac:spMkLst>
+        </pc:spChg>
+        <pc:spChg chg="mod">
+          <ac:chgData name="Good, Gavin Riley" userId="3384e738-8540-4d73-a9f5-fa11d2679fd4" providerId="ADAL" clId="{4E42D713-9302-492F-A851-20F1D99D0ECC}" dt="2026-09-17T13:03:49.381" v="44" actId="1076"/>
+          <ac:spMkLst>
+            <pc:docMk/>
+            <pc:sldMk cId="0" sldId="258"/>
+            <ac:spMk id="10" creationId="{00000000-0000-0000-0000-000000000000}"/>
+          </ac:spMkLst>
+        </pc:spChg>
+        <pc:spChg chg="mod">
+          <ac:chgData name="Good, Gavin Riley" userId="3384e738-8540-4d73-a9f5-fa11d2679fd4" providerId="ADAL" clId="{4E42D713-9302-492F-A851-20F1D99D0ECC}" dt="2026-09-17T13:03:49.381" v="44" actId="1076"/>
+          <ac:spMkLst>
+            <pc:docMk/>
+            <pc:sldMk cId="0" sldId="258"/>
+            <ac:spMk id="11" creationId="{00000000-0000-0000-0000-000000000000}"/>
+          </ac:spMkLst>
+        </pc:spChg>
+        <pc:spChg chg="mod">
+          <ac:chgData name="Good, Gavin Riley" userId="3384e738-8540-4d73-a9f5-fa11d2679fd4" providerId="ADAL" clId="{4E42D713-9302-492F-A851-20F1D99D0ECC}" dt="2026-09-17T13:03:49.381" v="44" actId="1076"/>
+          <ac:spMkLst>
+            <pc:docMk/>
+            <pc:sldMk cId="0" sldId="258"/>
+            <ac:spMk id="12" creationId="{00000000-0000-0000-0000-000000000000}"/>
+          </ac:spMkLst>
+        </pc:spChg>
+        <pc:spChg chg="mod">
+          <ac:chgData name="Good, Gavin Riley" userId="3384e738-8540-4d73-a9f5-fa11d2679fd4" providerId="ADAL" clId="{4E42D713-9302-492F-A851-20F1D99D0ECC}" dt="2026-09-17T13:03:49.381" v="44" actId="1076"/>
+          <ac:spMkLst>
+            <pc:docMk/>
+            <pc:sldMk cId="0" sldId="258"/>
+            <ac:spMk id="13" creationId="{00000000-0000-0000-0000-000000000000}"/>
+          </ac:spMkLst>
+        </pc:spChg>
+        <pc:spChg chg="mod">
+          <ac:chgData name="Good, Gavin Riley" userId="3384e738-8540-4d73-a9f5-fa11d2679fd4" providerId="ADAL" clId="{4E42D713-9302-492F-A851-20F1D99D0ECC}" dt="2026-09-17T13:03:50.225" v="46" actId="1076"/>
+          <ac:spMkLst>
+            <pc:docMk/>
+            <pc:sldMk cId="0" sldId="258"/>
+            <ac:spMk id="14" creationId="{00000000-0000-0000-0000-000000000000}"/>
+          </ac:spMkLst>
+        </pc:spChg>
+        <pc:spChg chg="mod">
+          <ac:chgData name="Good, Gavin Riley" userId="3384e738-8540-4d73-a9f5-fa11d2679fd4" providerId="ADAL" clId="{4E42D713-9302-492F-A851-20F1D99D0ECC}" dt="2026-09-17T13:03:50.225" v="46" actId="1076"/>
+          <ac:spMkLst>
+            <pc:docMk/>
+            <pc:sldMk cId="0" sldId="258"/>
+            <ac:spMk id="15" creationId="{00000000-0000-0000-0000-000000000000}"/>
+          </ac:spMkLst>
+        </pc:spChg>
+        <pc:spChg chg="mod">
+          <ac:chgData name="Good, Gavin Riley" userId="3384e738-8540-4d73-a9f5-fa11d2679fd4" providerId="ADAL" clId="{4E42D713-9302-492F-A851-20F1D99D0ECC}" dt="2026-09-17T13:03:50.225" v="46" actId="1076"/>
+          <ac:spMkLst>
+            <pc:docMk/>
+            <pc:sldMk cId="0" sldId="258"/>
+            <ac:spMk id="16" creationId="{00000000-0000-0000-0000-000000000000}"/>
+          </ac:spMkLst>
+        </pc:spChg>
+        <pc:spChg chg="mod">
+          <ac:chgData name="Good, Gavin Riley" userId="3384e738-8540-4d73-a9f5-fa11d2679fd4" providerId="ADAL" clId="{4E42D713-9302-492F-A851-20F1D99D0ECC}" dt="2026-09-17T13:03:50.225" v="46" actId="1076"/>
+          <ac:spMkLst>
+            <pc:docMk/>
+            <pc:sldMk cId="0" sldId="258"/>
+            <ac:spMk id="17" creationId="{00000000-0000-0000-0000-000000000000}"/>
+          </ac:spMkLst>
+        </pc:spChg>
+        <pc:spChg chg="mod">
+          <ac:chgData name="Good, Gavin Riley" userId="3384e738-8540-4d73-a9f5-fa11d2679fd4" providerId="ADAL" clId="{4E42D713-9302-492F-A851-20F1D99D0ECC}" dt="2026-09-17T13:03:50.225" v="46" actId="1076"/>
+          <ac:spMkLst>
+            <pc:docMk/>
+            <pc:sldMk cId="0" sldId="258"/>
+            <ac:spMk id="18" creationId="{00000000-0000-0000-0000-000000000000}"/>
+          </ac:spMkLst>
+        </pc:spChg>
+        <pc:spChg chg="mod">
+          <ac:chgData name="Good, Gavin Riley" userId="3384e738-8540-4d73-a9f5-fa11d2679fd4" providerId="ADAL" clId="{4E42D713-9302-492F-A851-20F1D99D0ECC}" dt="2026-09-17T13:03:49.814" v="45" actId="1076"/>
+          <ac:spMkLst>
+            <pc:docMk/>
+            <pc:sldMk cId="0" sldId="258"/>
+            <ac:spMk id="19" creationId="{00000000-0000-0000-0000-000000000000}"/>
+          </ac:spMkLst>
+        </pc:spChg>
+        <pc:spChg chg="mod">
+          <ac:chgData name="Good, Gavin Riley" userId="3384e738-8540-4d73-a9f5-fa11d2679fd4" providerId="ADAL" clId="{4E42D713-9302-492F-A851-20F1D99D0ECC}" dt="2026-09-17T13:03:49.814" v="45" actId="1076"/>
+          <ac:spMkLst>
+            <pc:docMk/>
+            <pc:sldMk cId="0" sldId="258"/>
+            <ac:spMk id="20" creationId="{00000000-0000-0000-0000-000000000000}"/>
+          </ac:spMkLst>
+        </pc:spChg>
+        <pc:spChg chg="mod">
+          <ac:chgData name="Good, Gavin Riley" userId="3384e738-8540-4d73-a9f5-fa11d2679fd4" providerId="ADAL" clId="{4E42D713-9302-492F-A851-20F1D99D0ECC}" dt="2026-09-17T13:03:49.814" v="45" actId="1076"/>
+          <ac:spMkLst>
+            <pc:docMk/>
+            <pc:sldMk cId="0" sldId="258"/>
+            <ac:spMk id="21" creationId="{00000000-0000-0000-0000-000000000000}"/>
+          </ac:spMkLst>
+        </pc:spChg>
+        <pc:spChg chg="mod">
+          <ac:chgData name="Good, Gavin Riley" userId="3384e738-8540-4d73-a9f5-fa11d2679fd4" providerId="ADAL" clId="{4E42D713-9302-492F-A851-20F1D99D0ECC}" dt="2026-09-17T13:03:49.814" v="45" actId="1076"/>
+          <ac:spMkLst>
+            <pc:docMk/>
+            <pc:sldMk cId="0" sldId="258"/>
+            <ac:spMk id="22" creationId="{00000000-0000-0000-0000-000000000000}"/>
+          </ac:spMkLst>
+        </pc:spChg>
+        <pc:spChg chg="mod">
+          <ac:chgData name="Good, Gavin Riley" userId="3384e738-8540-4d73-a9f5-fa11d2679fd4" providerId="ADAL" clId="{4E42D713-9302-492F-A851-20F1D99D0ECC}" dt="2026-09-17T13:03:49.814" v="45" actId="1076"/>
+          <ac:spMkLst>
+            <pc:docMk/>
+            <pc:sldMk cId="0" sldId="258"/>
+            <ac:spMk id="23" creationId="{00000000-0000-0000-0000-000000000000}"/>
+          </ac:spMkLst>
+        </pc:spChg>
+        <pc:spChg chg="add">
+          <ac:chgData name="Good, Gavin Riley" userId="3384e738-8540-4d73-a9f5-fa11d2679fd4" providerId="ADAL" clId="{4E42D713-9302-492F-A851-20F1D99D0ECC}" dt="2026-09-17T13:04:16.215" v="47" actId="11529"/>
+          <ac:spMkLst>
+            <pc:docMk/>
+            <pc:sldMk cId="0" sldId="258"/>
+            <ac:spMk id="24" creationId="{8F634649-DD3F-DEFE-A65E-D58A56BF119E}"/>
+          </ac:spMkLst>
+        </pc:spChg>
+        <pc:spChg chg="add del">
+          <ac:chgData name="Good, Gavin Riley" userId="3384e738-8540-4d73-a9f5-fa11d2679fd4" providerId="ADAL" clId="{4E42D713-9302-492F-A851-20F1D99D0ECC}" dt="2026-09-17T13:04:25.576" v="49" actId="478"/>
+          <ac:spMkLst>
+            <pc:docMk/>
+            <pc:sldMk cId="0" sldId="258"/>
+            <ac:spMk id="26" creationId="{E7041B66-1404-0BC1-399C-EEA942D82896}"/>
+          </ac:spMkLst>
+        </pc:spChg>
+        <pc:spChg chg="add mod">
+          <ac:chgData name="Good, Gavin Riley" userId="3384e738-8540-4d73-a9f5-fa11d2679fd4" providerId="ADAL" clId="{4E42D713-9302-492F-A851-20F1D99D0ECC}" dt="2026-09-17T13:05:00.427" v="57" actId="1076"/>
+          <ac:spMkLst>
+            <pc:docMk/>
+            <pc:sldMk cId="0" sldId="258"/>
+            <ac:spMk id="27" creationId="{F0B74F4F-24D6-7CCD-8B5D-048C06FFB526}"/>
+          </ac:spMkLst>
+        </pc:spChg>
+        <pc:spChg chg="add mod">
+          <ac:chgData name="Good, Gavin Riley" userId="3384e738-8540-4d73-a9f5-fa11d2679fd4" providerId="ADAL" clId="{4E42D713-9302-492F-A851-20F1D99D0ECC}" dt="2026-09-17T13:05:09.273" v="59" actId="1076"/>
+          <ac:spMkLst>
+            <pc:docMk/>
+            <pc:sldMk cId="0" sldId="258"/>
+            <ac:spMk id="29" creationId="{09E9A971-ABFE-ABC4-70BC-F7ADC879B2C2}"/>
+          </ac:spMkLst>
+        </pc:spChg>
+      </pc:sldChg>
+      <pc:sldChg chg="modSp mod">
+        <pc:chgData name="Good, Gavin Riley" userId="3384e738-8540-4d73-a9f5-fa11d2679fd4" providerId="ADAL" clId="{4E42D713-9302-492F-A851-20F1D99D0ECC}" dt="2026-09-17T13:07:15.624" v="63" actId="1076"/>
+        <pc:sldMkLst>
+          <pc:docMk/>
+          <pc:sldMk cId="0" sldId="259"/>
+        </pc:sldMkLst>
+        <pc:spChg chg="mod">
+          <ac:chgData name="Good, Gavin Riley" userId="3384e738-8540-4d73-a9f5-fa11d2679fd4" providerId="ADAL" clId="{4E42D713-9302-492F-A851-20F1D99D0ECC}" dt="2026-09-17T13:06:16.073" v="61" actId="1076"/>
+          <ac:spMkLst>
+            <pc:docMk/>
+            <pc:sldMk cId="0" sldId="259"/>
+            <ac:spMk id="4" creationId="{00000000-0000-0000-0000-000000000000}"/>
+          </ac:spMkLst>
+        </pc:spChg>
+        <pc:spChg chg="mod">
+          <ac:chgData name="Good, Gavin Riley" userId="3384e738-8540-4d73-a9f5-fa11d2679fd4" providerId="ADAL" clId="{4E42D713-9302-492F-A851-20F1D99D0ECC}" dt="2026-09-17T13:07:15.624" v="63" actId="1076"/>
+          <ac:spMkLst>
+            <pc:docMk/>
+            <pc:sldMk cId="0" sldId="259"/>
+            <ac:spMk id="7" creationId="{00000000-0000-0000-0000-000000000000}"/>
+          </ac:spMkLst>
+        </pc:spChg>
+      </pc:sldChg>
+      <pc:sldChg chg="modSp mod">
+        <pc:chgData name="Good, Gavin Riley" userId="3384e738-8540-4d73-a9f5-fa11d2679fd4" providerId="ADAL" clId="{4E42D713-9302-492F-A851-20F1D99D0ECC}" dt="2026-09-17T13:01:13.385" v="24" actId="27636"/>
+        <pc:sldMkLst>
+          <pc:docMk/>
+          <pc:sldMk cId="0" sldId="260"/>
+        </pc:sldMkLst>
+        <pc:spChg chg="mod">
+          <ac:chgData name="Good, Gavin Riley" userId="3384e738-8540-4d73-a9f5-fa11d2679fd4" providerId="ADAL" clId="{4E42D713-9302-492F-A851-20F1D99D0ECC}" dt="2026-09-17T13:01:13.385" v="24" actId="27636"/>
+          <ac:spMkLst>
+            <pc:docMk/>
+            <pc:sldMk cId="0" sldId="260"/>
+            <ac:spMk id="8" creationId="{00000000-0000-0000-0000-000000000000}"/>
+          </ac:spMkLst>
+        </pc:spChg>
+      </pc:sldChg>
+      <pc:sldChg chg="addSp delSp modSp mod">
+        <pc:chgData name="Good, Gavin Riley" userId="3384e738-8540-4d73-a9f5-fa11d2679fd4" providerId="ADAL" clId="{4E42D713-9302-492F-A851-20F1D99D0ECC}" dt="2026-09-17T13:08:35.794" v="79" actId="27636"/>
+        <pc:sldMkLst>
+          <pc:docMk/>
+          <pc:sldMk cId="0" sldId="261"/>
+        </pc:sldMkLst>
+        <pc:spChg chg="del mod">
+          <ac:chgData name="Good, Gavin Riley" userId="3384e738-8540-4d73-a9f5-fa11d2679fd4" providerId="ADAL" clId="{4E42D713-9302-492F-A851-20F1D99D0ECC}" dt="2026-09-17T13:07:58.075" v="67" actId="478"/>
+          <ac:spMkLst>
+            <pc:docMk/>
+            <pc:sldMk cId="0" sldId="261"/>
+            <ac:spMk id="7" creationId="{00000000-0000-0000-0000-000000000000}"/>
+          </ac:spMkLst>
+        </pc:spChg>
+        <pc:spChg chg="mod">
+          <ac:chgData name="Good, Gavin Riley" userId="3384e738-8540-4d73-a9f5-fa11d2679fd4" providerId="ADAL" clId="{4E42D713-9302-492F-A851-20F1D99D0ECC}" dt="2026-09-17T13:08:35.794" v="79" actId="27636"/>
+          <ac:spMkLst>
+            <pc:docMk/>
+            <pc:sldMk cId="0" sldId="261"/>
+            <ac:spMk id="8" creationId="{00000000-0000-0000-0000-000000000000}"/>
+          </ac:spMkLst>
+        </pc:spChg>
+        <pc:spChg chg="add mod ord">
+          <ac:chgData name="Good, Gavin Riley" userId="3384e738-8540-4d73-a9f5-fa11d2679fd4" providerId="ADAL" clId="{4E42D713-9302-492F-A851-20F1D99D0ECC}" dt="2026-09-17T13:08:09.541" v="71" actId="171"/>
+          <ac:spMkLst>
+            <pc:docMk/>
+            <pc:sldMk cId="0" sldId="261"/>
+            <ac:spMk id="10" creationId="{DDF25429-7140-886E-8D6B-E34F115C4D17}"/>
+          </ac:spMkLst>
+        </pc:spChg>
+      </pc:sldChg>
+      <pc:sldChg chg="modSp mod">
+        <pc:chgData name="Good, Gavin Riley" userId="3384e738-8540-4d73-a9f5-fa11d2679fd4" providerId="ADAL" clId="{4E42D713-9302-492F-A851-20F1D99D0ECC}" dt="2026-09-17T13:01:13.392" v="26" actId="27636"/>
+        <pc:sldMkLst>
+          <pc:docMk/>
+          <pc:sldMk cId="0" sldId="262"/>
+        </pc:sldMkLst>
+        <pc:spChg chg="mod">
+          <ac:chgData name="Good, Gavin Riley" userId="3384e738-8540-4d73-a9f5-fa11d2679fd4" providerId="ADAL" clId="{4E42D713-9302-492F-A851-20F1D99D0ECC}" dt="2026-09-17T13:01:13.392" v="26" actId="27636"/>
+          <ac:spMkLst>
+            <pc:docMk/>
+            <pc:sldMk cId="0" sldId="262"/>
+            <ac:spMk id="14" creationId="{00000000-0000-0000-0000-000000000000}"/>
+          </ac:spMkLst>
+        </pc:spChg>
+      </pc:sldChg>
+    </pc:docChg>
+  </pc:docChgLst>
+</pc:chgInfo>
 </file>
 
 <file path=ppt/notesMasters/notesMaster1.xml><?xml version="1.0" encoding="utf-8"?>
@@ -1549,7 +1925,7 @@
         </p:nvSpPr>
         <p:spPr>
           <a:xfrm>
-            <a:off x="685800" y="1325880"/>
+            <a:off x="1112520" y="2162642"/>
             <a:ext cx="9966960" cy="548640"/>
           </a:xfrm>
           <a:prstGeom prst="rect">
@@ -1560,7 +1936,7 @@
         </p:spPr>
         <p:txBody>
           <a:bodyPr wrap="square" lIns="0" tIns="0" rIns="0" bIns="0" rtlCol="0" anchor="ctr">
-            <a:normAutofit/>
+            <a:normAutofit fontScale="92500" lnSpcReduction="20000"/>
           </a:bodyPr>
           <a:lstStyle/>
           <a:p>
@@ -1587,7 +1963,7 @@
         </p:nvSpPr>
         <p:spPr>
           <a:xfrm>
-            <a:off x="777240" y="2240280"/>
+            <a:off x="594360" y="3118019"/>
             <a:ext cx="3291840" cy="2057400"/>
           </a:xfrm>
           <a:prstGeom prst="rect">
@@ -1619,7 +1995,7 @@
         </p:nvSpPr>
         <p:spPr>
           <a:xfrm>
-            <a:off x="960120" y="2404872"/>
+            <a:off x="777240" y="3282611"/>
             <a:ext cx="2926080" cy="228600"/>
           </a:xfrm>
           <a:prstGeom prst="rect">
@@ -1655,7 +2031,7 @@
         </p:nvSpPr>
         <p:spPr>
           <a:xfrm>
-            <a:off x="960120" y="2770632"/>
+            <a:off x="777240" y="3648371"/>
             <a:ext cx="2926080" cy="1371600"/>
           </a:xfrm>
           <a:prstGeom prst="rect">
@@ -1693,7 +2069,7 @@
         </p:nvSpPr>
         <p:spPr>
           <a:xfrm>
-            <a:off x="4434840" y="2240280"/>
+            <a:off x="4251960" y="3118019"/>
             <a:ext cx="3291840" cy="2057400"/>
           </a:xfrm>
           <a:prstGeom prst="rect">
@@ -1725,7 +2101,7 @@
         </p:nvSpPr>
         <p:spPr>
           <a:xfrm>
-            <a:off x="4617720" y="2404872"/>
+            <a:off x="4434840" y="3282611"/>
             <a:ext cx="2926080" cy="228600"/>
           </a:xfrm>
           <a:prstGeom prst="rect">
@@ -1761,8 +2137,8 @@
         </p:nvSpPr>
         <p:spPr>
           <a:xfrm>
-            <a:off x="4617720" y="2770632"/>
-            <a:ext cx="2926080" cy="1371600"/>
+            <a:off x="4434840" y="3648371"/>
+            <a:ext cx="2926080" cy="1527048"/>
           </a:xfrm>
           <a:prstGeom prst="rect">
             <a:avLst/>
@@ -1772,7 +2148,7 @@
         </p:spPr>
         <p:txBody>
           <a:bodyPr wrap="square" lIns="0" tIns="0" rIns="0" bIns="0" rtlCol="0" anchor="t">
-            <a:normAutofit/>
+            <a:normAutofit lnSpcReduction="10000"/>
           </a:bodyPr>
           <a:lstStyle/>
           <a:p>
@@ -1785,7 +2161,20 @@
                   <a:srgbClr val="111827"/>
                 </a:solidFill>
               </a:rPr>
-              <a:t>The Return of Sherlock Holmes and The House on the Borderland test whether word counts shift more when author, genre, and narration style change.</a:t>
+              <a:t>The Return of Sherlock Holmes by  Arthur Conan Doyle and The House on the Borderland by William Hope Hodgson</a:t>
+            </a:r>
+          </a:p>
+          <a:p>
+            <a:pPr marL="0" indent="0">
+              <a:buNone/>
+            </a:pPr>
+            <a:r>
+              <a:rPr lang="en-US" sz="1450" dirty="0">
+                <a:solidFill>
+                  <a:srgbClr val="111827"/>
+                </a:solidFill>
+              </a:rPr>
+              <a:t> test whether word counts shift more when author, genre, and narration style change.</a:t>
             </a:r>
             <a:endParaRPr lang="en-US" sz="1450" dirty="0"/>
           </a:p>
@@ -1799,7 +2188,7 @@
         </p:nvSpPr>
         <p:spPr>
           <a:xfrm>
-            <a:off x="8092440" y="2240280"/>
+            <a:off x="7909560" y="3118019"/>
             <a:ext cx="3291840" cy="2057400"/>
           </a:xfrm>
           <a:prstGeom prst="rect">
@@ -1831,7 +2220,7 @@
         </p:nvSpPr>
         <p:spPr>
           <a:xfrm>
-            <a:off x="8275320" y="2404872"/>
+            <a:off x="8092440" y="3282611"/>
             <a:ext cx="2926080" cy="228600"/>
           </a:xfrm>
           <a:prstGeom prst="rect">
@@ -1867,7 +2256,7 @@
         </p:nvSpPr>
         <p:spPr>
           <a:xfrm>
-            <a:off x="8275320" y="2770632"/>
+            <a:off x="8092440" y="3648371"/>
             <a:ext cx="2926080" cy="1371600"/>
           </a:xfrm>
           <a:prstGeom prst="rect">
@@ -1894,44 +2283,6 @@
               <a:t>Names and dialogue words should reveal point of view and plot focus, while descriptive words should hint at genre and setting.</a:t>
             </a:r>
             <a:endParaRPr lang="en-US" sz="1450" dirty="0"/>
-          </a:p>
-        </p:txBody>
-      </p:sp>
-      <p:sp>
-        <p:nvSpPr>
-          <p:cNvPr id="14" name="Text 12"/>
-          <p:cNvSpPr/>
-          <p:nvPr/>
-        </p:nvSpPr>
-        <p:spPr>
-          <a:xfrm>
-            <a:off x="960120" y="5166360"/>
-            <a:ext cx="10241280" cy="502920"/>
-          </a:xfrm>
-          <a:prstGeom prst="rect">
-            <a:avLst/>
-          </a:prstGeom>
-          <a:noFill/>
-          <a:ln/>
-        </p:spPr>
-        <p:txBody>
-          <a:bodyPr wrap="square" lIns="0" tIns="0" rIns="0" bIns="0" rtlCol="0" anchor="ctr">
-            <a:normAutofit/>
-          </a:bodyPr>
-          <a:lstStyle/>
-          <a:p>
-            <a:pPr marL="0" indent="0" algn="ctr">
-              <a:buNone/>
-            </a:pPr>
-            <a:r>
-              <a:rPr lang="en-US" sz="1700" i="1" dirty="0">
-                <a:solidFill>
-                  <a:srgbClr val="5C6670"/>
-                </a:solidFill>
-              </a:rPr>
-              <a:t>These charts are not meant to “prove” literary meaning on their own, but they give a quick data trace to start asking better questions.</a:t>
-            </a:r>
-            <a:endParaRPr lang="en-US" sz="1700" dirty="0"/>
           </a:p>
         </p:txBody>
       </p:sp>
@@ -2062,7 +2413,7 @@
           <a:bodyPr/>
           <a:lstStyle/>
           <a:p>
-            <a:endParaRPr lang="en-US"/>
+            <a:endParaRPr lang="en-US" dirty="0"/>
           </a:p>
         </p:txBody>
       </p:sp>
@@ -2189,7 +2540,7 @@
         </p:spPr>
         <p:txBody>
           <a:bodyPr wrap="square" lIns="0" tIns="0" rIns="0" bIns="0" rtlCol="0" anchor="ctr">
-            <a:normAutofit/>
+            <a:normAutofit fontScale="92500" lnSpcReduction="20000"/>
           </a:bodyPr>
           <a:lstStyle/>
           <a:p>
@@ -2363,7 +2714,7 @@
         </p:spPr>
         <p:txBody>
           <a:bodyPr wrap="square" lIns="0" tIns="0" rIns="0" bIns="0" rtlCol="0" anchor="ctr">
-            <a:normAutofit/>
+            <a:normAutofit fontScale="92500" lnSpcReduction="20000"/>
           </a:bodyPr>
           <a:lstStyle/>
           <a:p>
@@ -2537,7 +2888,7 @@
         </p:spPr>
         <p:txBody>
           <a:bodyPr wrap="square" lIns="0" tIns="0" rIns="0" bIns="0" rtlCol="0" anchor="ctr">
-            <a:normAutofit/>
+            <a:normAutofit fontScale="92500" lnSpcReduction="20000"/>
           </a:bodyPr>
           <a:lstStyle/>
           <a:p>
@@ -2711,7 +3062,7 @@
         </p:spPr>
         <p:txBody>
           <a:bodyPr wrap="square" lIns="0" tIns="0" rIns="0" bIns="0" rtlCol="0" anchor="ctr">
-            <a:normAutofit/>
+            <a:normAutofit fontScale="92500" lnSpcReduction="20000"/>
           </a:bodyPr>
           <a:lstStyle/>
           <a:p>
@@ -2757,6 +3108,144 @@
               <a:buNone/>
             </a:pPr>
             <a:endParaRPr lang="en-US" sz="1380" dirty="0"/>
+          </a:p>
+        </p:txBody>
+      </p:sp>
+      <p:sp>
+        <p:nvSpPr>
+          <p:cNvPr id="24" name="Arrow: Right 23">
+            <a:extLst>
+              <a:ext uri="{FF2B5EF4-FFF2-40B4-BE49-F238E27FC236}">
+                <a16:creationId xmlns:a16="http://schemas.microsoft.com/office/drawing/2014/main" id="{8F634649-DD3F-DEFE-A65E-D58A56BF119E}"/>
+              </a:ext>
+            </a:extLst>
+          </p:cNvPr>
+          <p:cNvSpPr/>
+          <p:nvPr/>
+        </p:nvSpPr>
+        <p:spPr>
+          <a:xfrm>
+            <a:off x="5719313" y="2084832"/>
+            <a:ext cx="376687" cy="164592"/>
+          </a:xfrm>
+          <a:prstGeom prst="rightArrow">
+            <a:avLst/>
+          </a:prstGeom>
+        </p:spPr>
+        <p:style>
+          <a:lnRef idx="2">
+            <a:schemeClr val="accent1">
+              <a:shade val="15000"/>
+            </a:schemeClr>
+          </a:lnRef>
+          <a:fillRef idx="1">
+            <a:schemeClr val="accent1"/>
+          </a:fillRef>
+          <a:effectRef idx="0">
+            <a:schemeClr val="accent1"/>
+          </a:effectRef>
+          <a:fontRef idx="minor">
+            <a:schemeClr val="lt1"/>
+          </a:fontRef>
+        </p:style>
+        <p:txBody>
+          <a:bodyPr rtlCol="0" anchor="ctr"/>
+          <a:lstStyle/>
+          <a:p>
+            <a:pPr algn="ctr"/>
+            <a:endParaRPr lang="en-US"/>
+          </a:p>
+        </p:txBody>
+      </p:sp>
+      <p:sp>
+        <p:nvSpPr>
+          <p:cNvPr id="27" name="Arrow: Right 26">
+            <a:extLst>
+              <a:ext uri="{FF2B5EF4-FFF2-40B4-BE49-F238E27FC236}">
+                <a16:creationId xmlns:a16="http://schemas.microsoft.com/office/drawing/2014/main" id="{F0B74F4F-24D6-7CCD-8B5D-048C06FFB526}"/>
+              </a:ext>
+            </a:extLst>
+          </p:cNvPr>
+          <p:cNvSpPr/>
+          <p:nvPr/>
+        </p:nvSpPr>
+        <p:spPr>
+          <a:xfrm rot="8094745">
+            <a:off x="5639149" y="2985302"/>
+            <a:ext cx="555956" cy="166096"/>
+          </a:xfrm>
+          <a:prstGeom prst="rightArrow">
+            <a:avLst/>
+          </a:prstGeom>
+        </p:spPr>
+        <p:style>
+          <a:lnRef idx="2">
+            <a:schemeClr val="accent1">
+              <a:shade val="15000"/>
+            </a:schemeClr>
+          </a:lnRef>
+          <a:fillRef idx="1">
+            <a:schemeClr val="accent1"/>
+          </a:fillRef>
+          <a:effectRef idx="0">
+            <a:schemeClr val="accent1"/>
+          </a:effectRef>
+          <a:fontRef idx="minor">
+            <a:schemeClr val="lt1"/>
+          </a:fontRef>
+        </p:style>
+        <p:txBody>
+          <a:bodyPr rtlCol="0" anchor="ctr"/>
+          <a:lstStyle/>
+          <a:p>
+            <a:pPr algn="ctr"/>
+            <a:endParaRPr lang="en-US"/>
+          </a:p>
+        </p:txBody>
+      </p:sp>
+      <p:sp>
+        <p:nvSpPr>
+          <p:cNvPr id="29" name="Arrow: Right 28">
+            <a:extLst>
+              <a:ext uri="{FF2B5EF4-FFF2-40B4-BE49-F238E27FC236}">
+                <a16:creationId xmlns:a16="http://schemas.microsoft.com/office/drawing/2014/main" id="{09E9A971-ABFE-ABC4-70BC-F7ADC879B2C2}"/>
+              </a:ext>
+            </a:extLst>
+          </p:cNvPr>
+          <p:cNvSpPr/>
+          <p:nvPr/>
+        </p:nvSpPr>
+        <p:spPr>
+          <a:xfrm>
+            <a:off x="5728783" y="3867912"/>
+            <a:ext cx="376687" cy="164592"/>
+          </a:xfrm>
+          <a:prstGeom prst="rightArrow">
+            <a:avLst/>
+          </a:prstGeom>
+        </p:spPr>
+        <p:style>
+          <a:lnRef idx="2">
+            <a:schemeClr val="accent1">
+              <a:shade val="15000"/>
+            </a:schemeClr>
+          </a:lnRef>
+          <a:fillRef idx="1">
+            <a:schemeClr val="accent1"/>
+          </a:fillRef>
+          <a:effectRef idx="0">
+            <a:schemeClr val="accent1"/>
+          </a:effectRef>
+          <a:fontRef idx="minor">
+            <a:schemeClr val="lt1"/>
+          </a:fontRef>
+        </p:style>
+        <p:txBody>
+          <a:bodyPr rtlCol="0" anchor="ctr"/>
+          <a:lstStyle/>
+          <a:p>
+            <a:pPr algn="ctr"/>
+            <a:endParaRPr lang="en-US"/>
           </a:p>
         </p:txBody>
       </p:sp>
@@ -2867,7 +3356,7 @@
         </p:nvSpPr>
         <p:spPr>
           <a:xfrm>
-            <a:off x="822960" y="1417320"/>
+            <a:off x="566928" y="1984248"/>
             <a:ext cx="5577840" cy="3063240"/>
           </a:xfrm>
           <a:prstGeom prst="rect">
@@ -2887,7 +3376,7 @@
               <a:buChar char="•"/>
             </a:pPr>
             <a:r>
-              <a:rPr lang="en-US" sz="1750" dirty="0">
+              <a:rPr lang="en-US" dirty="0">
                 <a:solidFill>
                   <a:srgbClr val="111827"/>
                 </a:solidFill>
@@ -2897,7 +3386,7 @@
               </a:rPr>
               <a:t>The first word lists included punctuation, curly quotation marks, and blank tokens as if they were real words.</a:t>
             </a:r>
-            <a:endParaRPr lang="en-US" sz="1750" dirty="0"/>
+            <a:endParaRPr lang="en-US" dirty="0"/>
           </a:p>
           <a:p>
             <a:pPr marL="285750" indent="-285750">
@@ -2905,7 +3394,7 @@
               <a:buChar char="•"/>
             </a:pPr>
             <a:r>
-              <a:rPr lang="en-US" sz="1750" dirty="0">
+              <a:rPr lang="en-US" dirty="0">
                 <a:solidFill>
                   <a:srgbClr val="111827"/>
                 </a:solidFill>
@@ -2915,7 +3404,7 @@
               </a:rPr>
               <a:t>Regex strings created warning messages that made the notebook output messy.</a:t>
             </a:r>
-            <a:endParaRPr lang="en-US" sz="1750" dirty="0"/>
+            <a:endParaRPr lang="en-US" dirty="0"/>
           </a:p>
           <a:p>
             <a:pPr marL="285750" indent="-285750">
@@ -2923,7 +3412,7 @@
               <a:buChar char="•"/>
             </a:pPr>
             <a:r>
-              <a:rPr lang="en-US" sz="1750" dirty="0">
+              <a:rPr lang="en-US" dirty="0">
                 <a:solidFill>
                   <a:srgbClr val="111827"/>
                 </a:solidFill>
@@ -2933,7 +3422,7 @@
               </a:rPr>
               <a:t>Some chart settings caused tick-label issues or made the output harder to read.</a:t>
             </a:r>
-            <a:endParaRPr lang="en-US" sz="1750" dirty="0"/>
+            <a:endParaRPr lang="en-US" dirty="0"/>
           </a:p>
         </p:txBody>
       </p:sp>
@@ -2965,7 +3454,7 @@
           <a:bodyPr/>
           <a:lstStyle/>
           <a:p>
-            <a:endParaRPr lang="en-US"/>
+            <a:endParaRPr lang="en-US" dirty="0"/>
           </a:p>
         </p:txBody>
       </p:sp>
@@ -3013,7 +3502,7 @@
         </p:nvSpPr>
         <p:spPr>
           <a:xfrm>
-            <a:off x="6995160" y="2240280"/>
+            <a:off x="6766560" y="2246318"/>
             <a:ext cx="3749040" cy="1508760"/>
           </a:xfrm>
           <a:prstGeom prst="rect">
@@ -3028,8 +3517,9 @@
           </a:bodyPr>
           <a:lstStyle/>
           <a:p>
-            <a:pPr marL="0" indent="0">
-              <a:buNone/>
+            <a:pPr marL="285750" indent="-285750">
+              <a:buFont typeface="Arial" panose="020B0604020202020204" pitchFamily="34" charset="0"/>
+              <a:buChar char="•"/>
             </a:pPr>
             <a:r>
               <a:rPr lang="en-US" sz="1650" dirty="0">
@@ -3042,8 +3532,9 @@
             <a:endParaRPr lang="en-US" sz="1650" dirty="0"/>
           </a:p>
           <a:p>
-            <a:pPr marL="0" indent="0">
-              <a:buNone/>
+            <a:pPr marL="285750" indent="-285750">
+              <a:buFont typeface="Arial" panose="020B0604020202020204" pitchFamily="34" charset="0"/>
+              <a:buChar char="•"/>
             </a:pPr>
             <a:r>
               <a:rPr lang="en-US" sz="1650" dirty="0">
@@ -3056,8 +3547,9 @@
             <a:endParaRPr lang="en-US" sz="1650" dirty="0"/>
           </a:p>
           <a:p>
-            <a:pPr marL="0" indent="0">
-              <a:buNone/>
+            <a:pPr marL="285750" indent="-285750">
+              <a:buFont typeface="Arial" panose="020B0604020202020204" pitchFamily="34" charset="0"/>
+              <a:buChar char="•"/>
             </a:pPr>
             <a:r>
               <a:rPr lang="en-US" sz="1650" dirty="0">
@@ -3324,7 +3816,7 @@
           <a:bodyPr/>
           <a:lstStyle/>
           <a:p>
-            <a:endParaRPr lang="en-US"/>
+            <a:endParaRPr lang="en-US" dirty="0"/>
           </a:p>
         </p:txBody>
       </p:sp>
@@ -3347,7 +3839,7 @@
         </p:spPr>
         <p:txBody>
           <a:bodyPr wrap="square" lIns="0" tIns="0" rIns="0" bIns="0" rtlCol="0" anchor="ctr">
-            <a:normAutofit/>
+            <a:normAutofit fontScale="85000" lnSpcReduction="20000"/>
           </a:bodyPr>
           <a:lstStyle/>
           <a:p>
@@ -3527,6 +4019,44 @@
       </p:sp>
       <p:sp>
         <p:nvSpPr>
+          <p:cNvPr id="10" name="Shape 4">
+            <a:extLst>
+              <a:ext uri="{FF2B5EF4-FFF2-40B4-BE49-F238E27FC236}">
+                <a16:creationId xmlns:a16="http://schemas.microsoft.com/office/drawing/2014/main" id="{DDF25429-7140-886E-8D6B-E34F115C4D17}"/>
+              </a:ext>
+            </a:extLst>
+          </p:cNvPr>
+          <p:cNvSpPr/>
+          <p:nvPr/>
+        </p:nvSpPr>
+        <p:spPr>
+          <a:xfrm>
+            <a:off x="1272540" y="5477256"/>
+            <a:ext cx="9646920" cy="530352"/>
+          </a:xfrm>
+          <a:prstGeom prst="rect">
+            <a:avLst/>
+          </a:prstGeom>
+          <a:solidFill>
+            <a:srgbClr val="EEF4FA"/>
+          </a:solidFill>
+          <a:ln w="12700">
+            <a:solidFill>
+              <a:srgbClr val="DDE8F3"/>
+            </a:solidFill>
+            <a:prstDash val="solid"/>
+          </a:ln>
+        </p:spPr>
+        <p:txBody>
+          <a:bodyPr/>
+          <a:lstStyle/>
+          <a:p>
+            <a:endParaRPr lang="en-US" dirty="0"/>
+          </a:p>
+        </p:txBody>
+      </p:sp>
+      <p:sp>
+        <p:nvSpPr>
           <p:cNvPr id="6" name="Text 3"/>
           <p:cNvSpPr/>
           <p:nvPr/>
@@ -3593,38 +4123,6 @@
       </p:sp>
       <p:sp>
         <p:nvSpPr>
-          <p:cNvPr id="7" name="Shape 4"/>
-          <p:cNvSpPr/>
-          <p:nvPr/>
-        </p:nvSpPr>
-        <p:spPr>
-          <a:xfrm>
-            <a:off x="1143000" y="5440680"/>
-            <a:ext cx="9921240" cy="457200"/>
-          </a:xfrm>
-          <a:prstGeom prst="rect">
-            <a:avLst/>
-          </a:prstGeom>
-          <a:solidFill>
-            <a:srgbClr val="FFF4EC"/>
-          </a:solidFill>
-          <a:ln w="12700">
-            <a:solidFill>
-              <a:srgbClr val="F0D9CB"/>
-            </a:solidFill>
-            <a:prstDash val="solid"/>
-          </a:ln>
-        </p:spPr>
-        <p:txBody>
-          <a:bodyPr/>
-          <a:lstStyle/>
-          <a:p>
-            <a:endParaRPr lang="en-US"/>
-          </a:p>
-        </p:txBody>
-      </p:sp>
-      <p:sp>
-        <p:nvSpPr>
           <p:cNvPr id="8" name="Text 5"/>
           <p:cNvSpPr/>
           <p:nvPr/>
@@ -3632,7 +4130,7 @@
         <p:spPr>
           <a:xfrm>
             <a:off x="1417320" y="5596128"/>
-            <a:ext cx="9372600" cy="146304"/>
+            <a:ext cx="9372600" cy="269290"/>
           </a:xfrm>
           <a:prstGeom prst="rect">
             <a:avLst/>
@@ -3650,14 +4148,10 @@
               <a:buNone/>
             </a:pPr>
             <a:r>
-              <a:rPr lang="en-US" sz="1420" b="1" dirty="0">
-                <a:solidFill>
-                  <a:srgbClr val="7A411E"/>
-                </a:solidFill>
-              </a:rPr>
+              <a:rPr lang="en-US" sz="1200" b="1" dirty="0"/>
               <a:t>Takeaway: the different-author pair produced a stronger style/genre split than the Christie-only pair.</a:t>
             </a:r>
-            <a:endParaRPr lang="en-US" sz="1420" dirty="0"/>
+            <a:endParaRPr lang="en-US" sz="1200" dirty="0"/>
           </a:p>
         </p:txBody>
       </p:sp>
@@ -4133,7 +4627,7 @@
         </p:spPr>
         <p:txBody>
           <a:bodyPr wrap="square" lIns="0" tIns="0" rIns="0" bIns="0" rtlCol="0" anchor="ctr">
-            <a:normAutofit/>
+            <a:normAutofit fontScale="92500"/>
           </a:bodyPr>
           <a:lstStyle/>
           <a:p>
